--- a/public/projects/architecture-three-ways/dist/architecture-three-ways.pptx
+++ b/public/projects/architecture-three-ways/dist/architecture-three-ways.pptx
@@ -3001,11 +3001,11 @@
             </a:avLst>
           </a:prstGeom>
           <a:solidFill>
-            <a:srgbClr val="DCE6F0"/>
-          </a:solidFill>
-          <a:ln w="12700">
+            <a:srgbClr val="FFFFFF"/>
+          </a:solidFill>
+          <a:ln w="9525">
             <a:solidFill>
-              <a:srgbClr val="2F5D8A"/>
+              <a:srgbClr val="7C8591"/>
             </a:solidFill>
             <a:prstDash val="solid"/>
           </a:ln>
@@ -3028,11 +3028,11 @@
             </a:avLst>
           </a:prstGeom>
           <a:solidFill>
-            <a:srgbClr val="DCE6F0"/>
-          </a:solidFill>
-          <a:ln w="12700">
+            <a:srgbClr val="FFFFFF"/>
+          </a:solidFill>
+          <a:ln w="9525">
             <a:solidFill>
-              <a:srgbClr val="2F5D8A"/>
+              <a:srgbClr val="7C8591"/>
             </a:solidFill>
             <a:prstDash val="solid"/>
           </a:ln>
@@ -3055,11 +3055,11 @@
             </a:avLst>
           </a:prstGeom>
           <a:solidFill>
-            <a:srgbClr val="DCE6F0"/>
-          </a:solidFill>
-          <a:ln w="12700">
+            <a:srgbClr val="FFFFFF"/>
+          </a:solidFill>
+          <a:ln w="9525">
             <a:solidFill>
-              <a:srgbClr val="2F5D8A"/>
+              <a:srgbClr val="7C8591"/>
             </a:solidFill>
             <a:prstDash val="solid"/>
           </a:ln>
